--- a/lecture_5/Lecture_5.pptx
+++ b/lecture_5/Lecture_5.pptx
@@ -5534,7 +5534,7 @@
           <a:noFill/>
           <a:extLst>
             <a:ext uri="{909E8E84-426E-40dd-AFC4-6F175D3DCCD1}">
-              <a14:hiddenFill xmlns:a14="http://schemas.microsoft.com/office/drawing/2010/main" xmlns="">
+              <a14:hiddenFill xmlns="" xmlns:a14="http://schemas.microsoft.com/office/drawing/2010/main">
                 <a:solidFill>
                   <a:srgbClr val="FFFFFF"/>
                 </a:solidFill>
@@ -5593,7 +5593,7 @@
             </a:ln>
             <a:extLst>
               <a:ext uri="{91240B29-F687-4f45-9708-019B960494DF}">
-                <a14:hiddenLine xmlns:a14="http://schemas.microsoft.com/office/drawing/2010/main" xmlns="" w="9525">
+                <a14:hiddenLine xmlns="" xmlns:a14="http://schemas.microsoft.com/office/drawing/2010/main" w="9525">
                   <a:solidFill>
                     <a:srgbClr val="000000"/>
                   </a:solidFill>
@@ -5683,7 +5683,7 @@
             </a:ln>
             <a:extLst>
               <a:ext uri="{91240B29-F687-4f45-9708-019B960494DF}">
-                <a14:hiddenLine xmlns:a14="http://schemas.microsoft.com/office/drawing/2010/main" xmlns="" w="9525">
+                <a14:hiddenLine xmlns="" xmlns:a14="http://schemas.microsoft.com/office/drawing/2010/main" w="9525">
                   <a:solidFill>
                     <a:srgbClr val="000000"/>
                   </a:solidFill>
@@ -5773,7 +5773,7 @@
             </a:ln>
             <a:extLst>
               <a:ext uri="{91240B29-F687-4f45-9708-019B960494DF}">
-                <a14:hiddenLine xmlns:a14="http://schemas.microsoft.com/office/drawing/2010/main" xmlns="" w="9525">
+                <a14:hiddenLine xmlns="" xmlns:a14="http://schemas.microsoft.com/office/drawing/2010/main" w="9525">
                   <a:solidFill>
                     <a:srgbClr val="000000"/>
                   </a:solidFill>
@@ -5807,7 +5807,7 @@
             </a:ln>
             <a:extLst>
               <a:ext uri="{91240B29-F687-4f45-9708-019B960494DF}">
-                <a14:hiddenLine xmlns:a14="http://schemas.microsoft.com/office/drawing/2010/main" xmlns="" w="9525">
+                <a14:hiddenLine xmlns="" xmlns:a14="http://schemas.microsoft.com/office/drawing/2010/main" w="9525">
                   <a:solidFill>
                     <a:srgbClr val="000000"/>
                   </a:solidFill>
@@ -5897,7 +5897,7 @@
             </a:ln>
             <a:extLst>
               <a:ext uri="{91240B29-F687-4f45-9708-019B960494DF}">
-                <a14:hiddenLine xmlns:a14="http://schemas.microsoft.com/office/drawing/2010/main" xmlns="" w="9525">
+                <a14:hiddenLine xmlns="" xmlns:a14="http://schemas.microsoft.com/office/drawing/2010/main" w="9525">
                   <a:solidFill>
                     <a:srgbClr val="000000"/>
                   </a:solidFill>
@@ -5959,7 +5959,7 @@
             </a:ln>
             <a:extLst>
               <a:ext uri="{91240B29-F687-4f45-9708-019B960494DF}">
-                <a14:hiddenLine xmlns:a14="http://schemas.microsoft.com/office/drawing/2010/main" xmlns="" w="9525">
+                <a14:hiddenLine xmlns="" xmlns:a14="http://schemas.microsoft.com/office/drawing/2010/main" w="9525">
                   <a:solidFill>
                     <a:srgbClr val="000000"/>
                   </a:solidFill>
@@ -6021,7 +6021,7 @@
             </a:ln>
             <a:extLst>
               <a:ext uri="{91240B29-F687-4f45-9708-019B960494DF}">
-                <a14:hiddenLine xmlns:a14="http://schemas.microsoft.com/office/drawing/2010/main" xmlns="" w="9525">
+                <a14:hiddenLine xmlns="" xmlns:a14="http://schemas.microsoft.com/office/drawing/2010/main" w="9525">
                   <a:solidFill>
                     <a:srgbClr val="000000"/>
                   </a:solidFill>
@@ -6111,7 +6111,7 @@
             </a:ln>
             <a:extLst>
               <a:ext uri="{91240B29-F687-4f45-9708-019B960494DF}">
-                <a14:hiddenLine xmlns:a14="http://schemas.microsoft.com/office/drawing/2010/main" xmlns="" w="9525">
+                <a14:hiddenLine xmlns="" xmlns:a14="http://schemas.microsoft.com/office/drawing/2010/main" w="9525">
                   <a:solidFill>
                     <a:srgbClr val="000000"/>
                   </a:solidFill>
@@ -6173,7 +6173,7 @@
             </a:ln>
             <a:extLst>
               <a:ext uri="{91240B29-F687-4f45-9708-019B960494DF}">
-                <a14:hiddenLine xmlns:a14="http://schemas.microsoft.com/office/drawing/2010/main" xmlns="" w="9525">
+                <a14:hiddenLine xmlns="" xmlns:a14="http://schemas.microsoft.com/office/drawing/2010/main" w="9525">
                   <a:solidFill>
                     <a:srgbClr val="000000"/>
                   </a:solidFill>
@@ -6235,7 +6235,7 @@
             </a:ln>
             <a:extLst>
               <a:ext uri="{91240B29-F687-4f45-9708-019B960494DF}">
-                <a14:hiddenLine xmlns:a14="http://schemas.microsoft.com/office/drawing/2010/main" xmlns="" w="9525">
+                <a14:hiddenLine xmlns="" xmlns:a14="http://schemas.microsoft.com/office/drawing/2010/main" w="9525">
                   <a:solidFill>
                     <a:srgbClr val="000000"/>
                   </a:solidFill>
@@ -6325,7 +6325,7 @@
             </a:ln>
             <a:extLst>
               <a:ext uri="{91240B29-F687-4f45-9708-019B960494DF}">
-                <a14:hiddenLine xmlns:a14="http://schemas.microsoft.com/office/drawing/2010/main" xmlns="" w="9525">
+                <a14:hiddenLine xmlns="" xmlns:a14="http://schemas.microsoft.com/office/drawing/2010/main" w="9525">
                   <a:solidFill>
                     <a:srgbClr val="000000"/>
                   </a:solidFill>
@@ -6415,7 +6415,7 @@
             </a:ln>
             <a:extLst>
               <a:ext uri="{91240B29-F687-4f45-9708-019B960494DF}">
-                <a14:hiddenLine xmlns:a14="http://schemas.microsoft.com/office/drawing/2010/main" xmlns="" w="9525">
+                <a14:hiddenLine xmlns="" xmlns:a14="http://schemas.microsoft.com/office/drawing/2010/main" w="9525">
                   <a:solidFill>
                     <a:srgbClr val="000000"/>
                   </a:solidFill>
@@ -6477,7 +6477,7 @@
             </a:ln>
             <a:extLst>
               <a:ext uri="{91240B29-F687-4f45-9708-019B960494DF}">
-                <a14:hiddenLine xmlns:a14="http://schemas.microsoft.com/office/drawing/2010/main" xmlns="" w="9525">
+                <a14:hiddenLine xmlns="" xmlns:a14="http://schemas.microsoft.com/office/drawing/2010/main" w="9525">
                   <a:solidFill>
                     <a:srgbClr val="000000"/>
                   </a:solidFill>
@@ -6587,7 +6587,7 @@
             </a:ln>
             <a:extLst>
               <a:ext uri="{91240B29-F687-4f45-9708-019B960494DF}">
-                <a14:hiddenLine xmlns:a14="http://schemas.microsoft.com/office/drawing/2010/main" xmlns="" w="9525">
+                <a14:hiddenLine xmlns="" xmlns:a14="http://schemas.microsoft.com/office/drawing/2010/main" w="9525">
                   <a:solidFill>
                     <a:srgbClr val="000000"/>
                   </a:solidFill>
@@ -6649,7 +6649,7 @@
             </a:ln>
             <a:extLst>
               <a:ext uri="{91240B29-F687-4f45-9708-019B960494DF}">
-                <a14:hiddenLine xmlns:a14="http://schemas.microsoft.com/office/drawing/2010/main" xmlns="" w="9525">
+                <a14:hiddenLine xmlns="" xmlns:a14="http://schemas.microsoft.com/office/drawing/2010/main" w="9525">
                   <a:solidFill>
                     <a:srgbClr val="000000"/>
                   </a:solidFill>
@@ -6739,7 +6739,7 @@
             </a:ln>
             <a:extLst>
               <a:ext uri="{91240B29-F687-4f45-9708-019B960494DF}">
-                <a14:hiddenLine xmlns:a14="http://schemas.microsoft.com/office/drawing/2010/main" xmlns="" w="9525">
+                <a14:hiddenLine xmlns="" xmlns:a14="http://schemas.microsoft.com/office/drawing/2010/main" w="9525">
                   <a:solidFill>
                     <a:srgbClr val="000000"/>
                   </a:solidFill>
@@ -6829,7 +6829,7 @@
             </a:ln>
             <a:extLst>
               <a:ext uri="{91240B29-F687-4f45-9708-019B960494DF}">
-                <a14:hiddenLine xmlns:a14="http://schemas.microsoft.com/office/drawing/2010/main" xmlns="" w="9525">
+                <a14:hiddenLine xmlns="" xmlns:a14="http://schemas.microsoft.com/office/drawing/2010/main" w="9525">
                   <a:solidFill>
                     <a:srgbClr val="000000"/>
                   </a:solidFill>
@@ -6891,7 +6891,7 @@
             </a:ln>
             <a:extLst>
               <a:ext uri="{91240B29-F687-4f45-9708-019B960494DF}">
-                <a14:hiddenLine xmlns:a14="http://schemas.microsoft.com/office/drawing/2010/main" xmlns="" w="9525">
+                <a14:hiddenLine xmlns="" xmlns:a14="http://schemas.microsoft.com/office/drawing/2010/main" w="9525">
                   <a:solidFill>
                     <a:srgbClr val="000000"/>
                   </a:solidFill>
@@ -6981,7 +6981,7 @@
             </a:ln>
             <a:extLst>
               <a:ext uri="{91240B29-F687-4f45-9708-019B960494DF}">
-                <a14:hiddenLine xmlns:a14="http://schemas.microsoft.com/office/drawing/2010/main" xmlns="" w="9525">
+                <a14:hiddenLine xmlns="" xmlns:a14="http://schemas.microsoft.com/office/drawing/2010/main" w="9525">
                   <a:solidFill>
                     <a:srgbClr val="000000"/>
                   </a:solidFill>
@@ -7071,7 +7071,7 @@
             </a:ln>
             <a:extLst>
               <a:ext uri="{91240B29-F687-4f45-9708-019B960494DF}">
-                <a14:hiddenLine xmlns:a14="http://schemas.microsoft.com/office/drawing/2010/main" xmlns="" w="9525">
+                <a14:hiddenLine xmlns="" xmlns:a14="http://schemas.microsoft.com/office/drawing/2010/main" w="9525">
                   <a:solidFill>
                     <a:srgbClr val="000000"/>
                   </a:solidFill>
@@ -7127,7 +7127,7 @@
             </a:ln>
             <a:extLst>
               <a:ext uri="{91240B29-F687-4f45-9708-019B960494DF}">
-                <a14:hiddenLine xmlns:a14="http://schemas.microsoft.com/office/drawing/2010/main" xmlns="" w="9525">
+                <a14:hiddenLine xmlns="" xmlns:a14="http://schemas.microsoft.com/office/drawing/2010/main" w="9525">
                   <a:solidFill>
                     <a:srgbClr val="000000"/>
                   </a:solidFill>
@@ -7217,7 +7217,7 @@
             </a:ln>
             <a:extLst>
               <a:ext uri="{91240B29-F687-4f45-9708-019B960494DF}">
-                <a14:hiddenLine xmlns:a14="http://schemas.microsoft.com/office/drawing/2010/main" xmlns="" w="9525">
+                <a14:hiddenLine xmlns="" xmlns:a14="http://schemas.microsoft.com/office/drawing/2010/main" w="9525">
                   <a:solidFill>
                     <a:srgbClr val="000000"/>
                   </a:solidFill>
@@ -7273,7 +7273,7 @@
             </a:ln>
             <a:extLst>
               <a:ext uri="{91240B29-F687-4f45-9708-019B960494DF}">
-                <a14:hiddenLine xmlns:a14="http://schemas.microsoft.com/office/drawing/2010/main" xmlns="" w="9525">
+                <a14:hiddenLine xmlns="" xmlns:a14="http://schemas.microsoft.com/office/drawing/2010/main" w="9525">
                   <a:solidFill>
                     <a:srgbClr val="000000"/>
                   </a:solidFill>
@@ -7363,7 +7363,7 @@
             </a:ln>
             <a:extLst>
               <a:ext uri="{91240B29-F687-4f45-9708-019B960494DF}">
-                <a14:hiddenLine xmlns:a14="http://schemas.microsoft.com/office/drawing/2010/main" xmlns="" w="9525">
+                <a14:hiddenLine xmlns="" xmlns:a14="http://schemas.microsoft.com/office/drawing/2010/main" w="9525">
                   <a:solidFill>
                     <a:srgbClr val="000000"/>
                   </a:solidFill>
@@ -7431,7 +7431,7 @@
             </a:ln>
             <a:extLst>
               <a:ext uri="{91240B29-F687-4f45-9708-019B960494DF}">
-                <a14:hiddenLine xmlns:a14="http://schemas.microsoft.com/office/drawing/2010/main" xmlns="" w="9525">
+                <a14:hiddenLine xmlns="" xmlns:a14="http://schemas.microsoft.com/office/drawing/2010/main" w="9525">
                   <a:solidFill>
                     <a:srgbClr val="000000"/>
                   </a:solidFill>
@@ -7521,7 +7521,7 @@
             </a:ln>
             <a:extLst>
               <a:ext uri="{91240B29-F687-4f45-9708-019B960494DF}">
-                <a14:hiddenLine xmlns:a14="http://schemas.microsoft.com/office/drawing/2010/main" xmlns="" w="9525">
+                <a14:hiddenLine xmlns="" xmlns:a14="http://schemas.microsoft.com/office/drawing/2010/main" w="9525">
                   <a:solidFill>
                     <a:srgbClr val="000000"/>
                   </a:solidFill>
@@ -7589,7 +7589,7 @@
             </a:ln>
             <a:extLst>
               <a:ext uri="{91240B29-F687-4f45-9708-019B960494DF}">
-                <a14:hiddenLine xmlns:a14="http://schemas.microsoft.com/office/drawing/2010/main" xmlns="" w="9525">
+                <a14:hiddenLine xmlns="" xmlns:a14="http://schemas.microsoft.com/office/drawing/2010/main" w="9525">
                   <a:solidFill>
                     <a:srgbClr val="000000"/>
                   </a:solidFill>
@@ -7679,7 +7679,7 @@
             </a:ln>
             <a:extLst>
               <a:ext uri="{91240B29-F687-4f45-9708-019B960494DF}">
-                <a14:hiddenLine xmlns:a14="http://schemas.microsoft.com/office/drawing/2010/main" xmlns="" w="9525">
+                <a14:hiddenLine xmlns="" xmlns:a14="http://schemas.microsoft.com/office/drawing/2010/main" w="9525">
                   <a:solidFill>
                     <a:srgbClr val="000000"/>
                   </a:solidFill>
@@ -7713,7 +7713,7 @@
             </a:ln>
             <a:extLst>
               <a:ext uri="{91240B29-F687-4f45-9708-019B960494DF}">
-                <a14:hiddenLine xmlns:a14="http://schemas.microsoft.com/office/drawing/2010/main" xmlns="" w="9525">
+                <a14:hiddenLine xmlns="" xmlns:a14="http://schemas.microsoft.com/office/drawing/2010/main" w="9525">
                   <a:solidFill>
                     <a:srgbClr val="000000"/>
                   </a:solidFill>
@@ -7803,7 +7803,7 @@
             </a:ln>
             <a:extLst>
               <a:ext uri="{91240B29-F687-4f45-9708-019B960494DF}">
-                <a14:hiddenLine xmlns:a14="http://schemas.microsoft.com/office/drawing/2010/main" xmlns="" w="9525">
+                <a14:hiddenLine xmlns="" xmlns:a14="http://schemas.microsoft.com/office/drawing/2010/main" w="9525">
                   <a:solidFill>
                     <a:srgbClr val="000000"/>
                   </a:solidFill>
@@ -7865,7 +7865,7 @@
             </a:ln>
             <a:extLst>
               <a:ext uri="{91240B29-F687-4f45-9708-019B960494DF}">
-                <a14:hiddenLine xmlns:a14="http://schemas.microsoft.com/office/drawing/2010/main" xmlns="" w="9525">
+                <a14:hiddenLine xmlns="" xmlns:a14="http://schemas.microsoft.com/office/drawing/2010/main" w="9525">
                   <a:solidFill>
                     <a:srgbClr val="000000"/>
                   </a:solidFill>
@@ -7927,7 +7927,7 @@
             </a:ln>
             <a:extLst>
               <a:ext uri="{91240B29-F687-4f45-9708-019B960494DF}">
-                <a14:hiddenLine xmlns:a14="http://schemas.microsoft.com/office/drawing/2010/main" xmlns="" w="9525">
+                <a14:hiddenLine xmlns="" xmlns:a14="http://schemas.microsoft.com/office/drawing/2010/main" w="9525">
                   <a:solidFill>
                     <a:srgbClr val="000000"/>
                   </a:solidFill>
@@ -8017,7 +8017,7 @@
             </a:ln>
             <a:extLst>
               <a:ext uri="{91240B29-F687-4f45-9708-019B960494DF}">
-                <a14:hiddenLine xmlns:a14="http://schemas.microsoft.com/office/drawing/2010/main" xmlns="" w="9525">
+                <a14:hiddenLine xmlns="" xmlns:a14="http://schemas.microsoft.com/office/drawing/2010/main" w="9525">
                   <a:solidFill>
                     <a:srgbClr val="000000"/>
                   </a:solidFill>
@@ -8085,7 +8085,7 @@
             </a:ln>
             <a:extLst>
               <a:ext uri="{91240B29-F687-4f45-9708-019B960494DF}">
-                <a14:hiddenLine xmlns:a14="http://schemas.microsoft.com/office/drawing/2010/main" xmlns="" w="9525">
+                <a14:hiddenLine xmlns="" xmlns:a14="http://schemas.microsoft.com/office/drawing/2010/main" w="9525">
                   <a:solidFill>
                     <a:srgbClr val="000000"/>
                   </a:solidFill>
@@ -8147,7 +8147,7 @@
             </a:ln>
             <a:extLst>
               <a:ext uri="{91240B29-F687-4f45-9708-019B960494DF}">
-                <a14:hiddenLine xmlns:a14="http://schemas.microsoft.com/office/drawing/2010/main" xmlns="" w="9525">
+                <a14:hiddenLine xmlns="" xmlns:a14="http://schemas.microsoft.com/office/drawing/2010/main" w="9525">
                   <a:solidFill>
                     <a:srgbClr val="000000"/>
                   </a:solidFill>
@@ -8237,7 +8237,7 @@
             </a:ln>
             <a:extLst>
               <a:ext uri="{91240B29-F687-4f45-9708-019B960494DF}">
-                <a14:hiddenLine xmlns:a14="http://schemas.microsoft.com/office/drawing/2010/main" xmlns="" w="9525">
+                <a14:hiddenLine xmlns="" xmlns:a14="http://schemas.microsoft.com/office/drawing/2010/main" w="9525">
                   <a:solidFill>
                     <a:srgbClr val="000000"/>
                   </a:solidFill>
@@ -8299,7 +8299,7 @@
             </a:ln>
             <a:extLst>
               <a:ext uri="{91240B29-F687-4f45-9708-019B960494DF}">
-                <a14:hiddenLine xmlns:a14="http://schemas.microsoft.com/office/drawing/2010/main" xmlns="" w="9525">
+                <a14:hiddenLine xmlns="" xmlns:a14="http://schemas.microsoft.com/office/drawing/2010/main" w="9525">
                   <a:solidFill>
                     <a:srgbClr val="000000"/>
                   </a:solidFill>
@@ -8389,7 +8389,7 @@
             </a:ln>
             <a:extLst>
               <a:ext uri="{91240B29-F687-4f45-9708-019B960494DF}">
-                <a14:hiddenLine xmlns:a14="http://schemas.microsoft.com/office/drawing/2010/main" xmlns="" w="9525">
+                <a14:hiddenLine xmlns="" xmlns:a14="http://schemas.microsoft.com/office/drawing/2010/main" w="9525">
                   <a:solidFill>
                     <a:srgbClr val="000000"/>
                   </a:solidFill>
@@ -8451,7 +8451,7 @@
             </a:ln>
             <a:extLst>
               <a:ext uri="{91240B29-F687-4f45-9708-019B960494DF}">
-                <a14:hiddenLine xmlns:a14="http://schemas.microsoft.com/office/drawing/2010/main" xmlns="" w="9525">
+                <a14:hiddenLine xmlns="" xmlns:a14="http://schemas.microsoft.com/office/drawing/2010/main" w="9525">
                   <a:solidFill>
                     <a:srgbClr val="000000"/>
                   </a:solidFill>
@@ -8541,7 +8541,7 @@
             </a:ln>
             <a:extLst>
               <a:ext uri="{91240B29-F687-4f45-9708-019B960494DF}">
-                <a14:hiddenLine xmlns:a14="http://schemas.microsoft.com/office/drawing/2010/main" xmlns="" w="9525">
+                <a14:hiddenLine xmlns="" xmlns:a14="http://schemas.microsoft.com/office/drawing/2010/main" w="9525">
                   <a:solidFill>
                     <a:srgbClr val="000000"/>
                   </a:solidFill>
@@ -8575,7 +8575,7 @@
             </a:ln>
             <a:extLst>
               <a:ext uri="{91240B29-F687-4f45-9708-019B960494DF}">
-                <a14:hiddenLine xmlns:a14="http://schemas.microsoft.com/office/drawing/2010/main" xmlns="" w="9525">
+                <a14:hiddenLine xmlns="" xmlns:a14="http://schemas.microsoft.com/office/drawing/2010/main" w="9525">
                   <a:solidFill>
                     <a:srgbClr val="000000"/>
                   </a:solidFill>
@@ -8640,7 +8640,7 @@
             </a:ln>
             <a:extLst>
               <a:ext uri="{91240B29-F687-4f45-9708-019B960494DF}">
-                <a14:hiddenLine xmlns:a14="http://schemas.microsoft.com/office/drawing/2010/main" xmlns="" w="9525">
+                <a14:hiddenLine xmlns="" xmlns:a14="http://schemas.microsoft.com/office/drawing/2010/main" w="9525">
                   <a:solidFill>
                     <a:srgbClr val="000000"/>
                   </a:solidFill>
@@ -8730,7 +8730,7 @@
             </a:ln>
             <a:extLst>
               <a:ext uri="{91240B29-F687-4f45-9708-019B960494DF}">
-                <a14:hiddenLine xmlns:a14="http://schemas.microsoft.com/office/drawing/2010/main" xmlns="" w="9525">
+                <a14:hiddenLine xmlns="" xmlns:a14="http://schemas.microsoft.com/office/drawing/2010/main" w="9525">
                   <a:solidFill>
                     <a:srgbClr val="000000"/>
                   </a:solidFill>
@@ -8792,7 +8792,7 @@
             </a:ln>
             <a:extLst>
               <a:ext uri="{91240B29-F687-4f45-9708-019B960494DF}">
-                <a14:hiddenLine xmlns:a14="http://schemas.microsoft.com/office/drawing/2010/main" xmlns="" w="9525">
+                <a14:hiddenLine xmlns="" xmlns:a14="http://schemas.microsoft.com/office/drawing/2010/main" w="9525">
                   <a:solidFill>
                     <a:srgbClr val="000000"/>
                   </a:solidFill>
@@ -8882,7 +8882,7 @@
             </a:ln>
             <a:extLst>
               <a:ext uri="{91240B29-F687-4f45-9708-019B960494DF}">
-                <a14:hiddenLine xmlns:a14="http://schemas.microsoft.com/office/drawing/2010/main" xmlns="" w="9525">
+                <a14:hiddenLine xmlns="" xmlns:a14="http://schemas.microsoft.com/office/drawing/2010/main" w="9525">
                   <a:solidFill>
                     <a:srgbClr val="000000"/>
                   </a:solidFill>
@@ -8972,7 +8972,7 @@
             </a:ln>
             <a:extLst>
               <a:ext uri="{91240B29-F687-4f45-9708-019B960494DF}">
-                <a14:hiddenLine xmlns:a14="http://schemas.microsoft.com/office/drawing/2010/main" xmlns="" w="9525">
+                <a14:hiddenLine xmlns="" xmlns:a14="http://schemas.microsoft.com/office/drawing/2010/main" w="9525">
                   <a:solidFill>
                     <a:srgbClr val="000000"/>
                   </a:solidFill>
@@ -9037,7 +9037,7 @@
             </a:ln>
             <a:extLst>
               <a:ext uri="{91240B29-F687-4f45-9708-019B960494DF}">
-                <a14:hiddenLine xmlns:a14="http://schemas.microsoft.com/office/drawing/2010/main" xmlns="" w="9525">
+                <a14:hiddenLine xmlns="" xmlns:a14="http://schemas.microsoft.com/office/drawing/2010/main" w="9525">
                   <a:solidFill>
                     <a:srgbClr val="000000"/>
                   </a:solidFill>
@@ -9099,7 +9099,7 @@
             </a:ln>
             <a:extLst>
               <a:ext uri="{91240B29-F687-4f45-9708-019B960494DF}">
-                <a14:hiddenLine xmlns:a14="http://schemas.microsoft.com/office/drawing/2010/main" xmlns="" w="9525">
+                <a14:hiddenLine xmlns="" xmlns:a14="http://schemas.microsoft.com/office/drawing/2010/main" w="9525">
                   <a:solidFill>
                     <a:srgbClr val="000000"/>
                   </a:solidFill>
@@ -9189,7 +9189,7 @@
             </a:ln>
             <a:extLst>
               <a:ext uri="{91240B29-F687-4f45-9708-019B960494DF}">
-                <a14:hiddenLine xmlns:a14="http://schemas.microsoft.com/office/drawing/2010/main" xmlns="" w="9525">
+                <a14:hiddenLine xmlns="" xmlns:a14="http://schemas.microsoft.com/office/drawing/2010/main" w="9525">
                   <a:solidFill>
                     <a:srgbClr val="000000"/>
                   </a:solidFill>
@@ -9279,7 +9279,7 @@
             </a:ln>
             <a:extLst>
               <a:ext uri="{91240B29-F687-4f45-9708-019B960494DF}">
-                <a14:hiddenLine xmlns:a14="http://schemas.microsoft.com/office/drawing/2010/main" xmlns="" w="9525">
+                <a14:hiddenLine xmlns="" xmlns:a14="http://schemas.microsoft.com/office/drawing/2010/main" w="9525">
                   <a:solidFill>
                     <a:srgbClr val="000000"/>
                   </a:solidFill>
@@ -9341,7 +9341,7 @@
             </a:ln>
             <a:extLst>
               <a:ext uri="{91240B29-F687-4f45-9708-019B960494DF}">
-                <a14:hiddenLine xmlns:a14="http://schemas.microsoft.com/office/drawing/2010/main" xmlns="" w="9525">
+                <a14:hiddenLine xmlns="" xmlns:a14="http://schemas.microsoft.com/office/drawing/2010/main" w="9525">
                   <a:solidFill>
                     <a:srgbClr val="000000"/>
                   </a:solidFill>
@@ -9461,7 +9461,7 @@
             </a:ln>
             <a:extLst>
               <a:ext uri="{91240B29-F687-4f45-9708-019B960494DF}">
-                <a14:hiddenLine xmlns:a14="http://schemas.microsoft.com/office/drawing/2010/main" xmlns="" w="9525">
+                <a14:hiddenLine xmlns="" xmlns:a14="http://schemas.microsoft.com/office/drawing/2010/main" w="9525">
                   <a:solidFill>
                     <a:srgbClr val="000000"/>
                   </a:solidFill>
@@ -9529,7 +9529,7 @@
             </a:ln>
             <a:extLst>
               <a:ext uri="{91240B29-F687-4f45-9708-019B960494DF}">
-                <a14:hiddenLine xmlns:a14="http://schemas.microsoft.com/office/drawing/2010/main" xmlns="" w="9525">
+                <a14:hiddenLine xmlns="" xmlns:a14="http://schemas.microsoft.com/office/drawing/2010/main" w="9525">
                   <a:solidFill>
                     <a:srgbClr val="000000"/>
                   </a:solidFill>
@@ -9619,7 +9619,7 @@
             </a:ln>
             <a:extLst>
               <a:ext uri="{91240B29-F687-4f45-9708-019B960494DF}">
-                <a14:hiddenLine xmlns:a14="http://schemas.microsoft.com/office/drawing/2010/main" xmlns="" w="9525">
+                <a14:hiddenLine xmlns="" xmlns:a14="http://schemas.microsoft.com/office/drawing/2010/main" w="9525">
                   <a:solidFill>
                     <a:srgbClr val="000000"/>
                   </a:solidFill>
@@ -14433,7 +14433,7 @@
           <a:noFill/>
           <a:extLst>
             <a:ext uri="{909E8E84-426E-40dd-AFC4-6F175D3DCCD1}">
-              <a14:hiddenFill xmlns:a14="http://schemas.microsoft.com/office/drawing/2010/main" xmlns="">
+              <a14:hiddenFill xmlns="" xmlns:a14="http://schemas.microsoft.com/office/drawing/2010/main">
                 <a:solidFill>
                   <a:srgbClr val="FFFFFF"/>
                 </a:solidFill>
@@ -14507,7 +14507,7 @@
               </a:ln>
               <a:extLst>
                 <a:ext uri="{91240B29-F687-4f45-9708-019B960494DF}">
-                  <a14:hiddenLine xmlns:a14="http://schemas.microsoft.com/office/drawing/2010/main" xmlns="" w="9525">
+                  <a14:hiddenLine xmlns="" xmlns:a14="http://schemas.microsoft.com/office/drawing/2010/main" w="9525">
                     <a:solidFill>
                       <a:srgbClr val="000000"/>
                     </a:solidFill>
@@ -14597,7 +14597,7 @@
               </a:ln>
               <a:extLst>
                 <a:ext uri="{91240B29-F687-4f45-9708-019B960494DF}">
-                  <a14:hiddenLine xmlns:a14="http://schemas.microsoft.com/office/drawing/2010/main" xmlns="" w="9525">
+                  <a14:hiddenLine xmlns="" xmlns:a14="http://schemas.microsoft.com/office/drawing/2010/main" w="9525">
                     <a:solidFill>
                       <a:srgbClr val="000000"/>
                     </a:solidFill>
@@ -14687,7 +14687,7 @@
               </a:ln>
               <a:extLst>
                 <a:ext uri="{91240B29-F687-4f45-9708-019B960494DF}">
-                  <a14:hiddenLine xmlns:a14="http://schemas.microsoft.com/office/drawing/2010/main" xmlns="" w="9525">
+                  <a14:hiddenLine xmlns="" xmlns:a14="http://schemas.microsoft.com/office/drawing/2010/main" w="9525">
                     <a:solidFill>
                       <a:srgbClr val="000000"/>
                     </a:solidFill>
@@ -14749,7 +14749,7 @@
               </a:ln>
               <a:extLst>
                 <a:ext uri="{91240B29-F687-4f45-9708-019B960494DF}">
-                  <a14:hiddenLine xmlns:a14="http://schemas.microsoft.com/office/drawing/2010/main" xmlns="" w="9525">
+                  <a14:hiddenLine xmlns="" xmlns:a14="http://schemas.microsoft.com/office/drawing/2010/main" w="9525">
                     <a:solidFill>
                       <a:srgbClr val="000000"/>
                     </a:solidFill>
@@ -14839,7 +14839,7 @@
               </a:ln>
               <a:extLst>
                 <a:ext uri="{91240B29-F687-4f45-9708-019B960494DF}">
-                  <a14:hiddenLine xmlns:a14="http://schemas.microsoft.com/office/drawing/2010/main" xmlns="" w="9525">
+                  <a14:hiddenLine xmlns="" xmlns:a14="http://schemas.microsoft.com/office/drawing/2010/main" w="9525">
                     <a:solidFill>
                       <a:srgbClr val="000000"/>
                     </a:solidFill>
@@ -14901,7 +14901,7 @@
               </a:ln>
               <a:extLst>
                 <a:ext uri="{91240B29-F687-4f45-9708-019B960494DF}">
-                  <a14:hiddenLine xmlns:a14="http://schemas.microsoft.com/office/drawing/2010/main" xmlns="" w="9525">
+                  <a14:hiddenLine xmlns="" xmlns:a14="http://schemas.microsoft.com/office/drawing/2010/main" w="9525">
                     <a:solidFill>
                       <a:srgbClr val="000000"/>
                     </a:solidFill>
@@ -14963,7 +14963,7 @@
               </a:ln>
               <a:extLst>
                 <a:ext uri="{91240B29-F687-4f45-9708-019B960494DF}">
-                  <a14:hiddenLine xmlns:a14="http://schemas.microsoft.com/office/drawing/2010/main" xmlns="" w="9525">
+                  <a14:hiddenLine xmlns="" xmlns:a14="http://schemas.microsoft.com/office/drawing/2010/main" w="9525">
                     <a:solidFill>
                       <a:srgbClr val="000000"/>
                     </a:solidFill>
@@ -15053,7 +15053,7 @@
               </a:ln>
               <a:extLst>
                 <a:ext uri="{91240B29-F687-4f45-9708-019B960494DF}">
-                  <a14:hiddenLine xmlns:a14="http://schemas.microsoft.com/office/drawing/2010/main" xmlns="" w="9525">
+                  <a14:hiddenLine xmlns="" xmlns:a14="http://schemas.microsoft.com/office/drawing/2010/main" w="9525">
                     <a:solidFill>
                       <a:srgbClr val="000000"/>
                     </a:solidFill>
@@ -15143,7 +15143,7 @@
               </a:ln>
               <a:extLst>
                 <a:ext uri="{91240B29-F687-4f45-9708-019B960494DF}">
-                  <a14:hiddenLine xmlns:a14="http://schemas.microsoft.com/office/drawing/2010/main" xmlns="" w="9525">
+                  <a14:hiddenLine xmlns="" xmlns:a14="http://schemas.microsoft.com/office/drawing/2010/main" w="9525">
                     <a:solidFill>
                       <a:srgbClr val="000000"/>
                     </a:solidFill>
@@ -15205,7 +15205,7 @@
               </a:ln>
               <a:extLst>
                 <a:ext uri="{91240B29-F687-4f45-9708-019B960494DF}">
-                  <a14:hiddenLine xmlns:a14="http://schemas.microsoft.com/office/drawing/2010/main" xmlns="" w="9525">
+                  <a14:hiddenLine xmlns="" xmlns:a14="http://schemas.microsoft.com/office/drawing/2010/main" w="9525">
                     <a:solidFill>
                       <a:srgbClr val="000000"/>
                     </a:solidFill>
@@ -15315,7 +15315,7 @@
               </a:ln>
               <a:extLst>
                 <a:ext uri="{91240B29-F687-4f45-9708-019B960494DF}">
-                  <a14:hiddenLine xmlns:a14="http://schemas.microsoft.com/office/drawing/2010/main" xmlns="" w="9525">
+                  <a14:hiddenLine xmlns="" xmlns:a14="http://schemas.microsoft.com/office/drawing/2010/main" w="9525">
                     <a:solidFill>
                       <a:srgbClr val="000000"/>
                     </a:solidFill>
@@ -15399,7 +15399,7 @@
               </a:ln>
               <a:extLst>
                 <a:ext uri="{91240B29-F687-4f45-9708-019B960494DF}">
-                  <a14:hiddenLine xmlns:a14="http://schemas.microsoft.com/office/drawing/2010/main" xmlns="" w="9525">
+                  <a14:hiddenLine xmlns="" xmlns:a14="http://schemas.microsoft.com/office/drawing/2010/main" w="9525">
                     <a:solidFill>
                       <a:srgbClr val="000000"/>
                     </a:solidFill>
@@ -15461,7 +15461,7 @@
               </a:ln>
               <a:extLst>
                 <a:ext uri="{91240B29-F687-4f45-9708-019B960494DF}">
-                  <a14:hiddenLine xmlns:a14="http://schemas.microsoft.com/office/drawing/2010/main" xmlns="" w="9525">
+                  <a14:hiddenLine xmlns="" xmlns:a14="http://schemas.microsoft.com/office/drawing/2010/main" w="9525">
                     <a:solidFill>
                       <a:srgbClr val="000000"/>
                     </a:solidFill>
@@ -15523,7 +15523,7 @@
               </a:ln>
               <a:extLst>
                 <a:ext uri="{91240B29-F687-4f45-9708-019B960494DF}">
-                  <a14:hiddenLine xmlns:a14="http://schemas.microsoft.com/office/drawing/2010/main" xmlns="" w="9525">
+                  <a14:hiddenLine xmlns="" xmlns:a14="http://schemas.microsoft.com/office/drawing/2010/main" w="9525">
                     <a:solidFill>
                       <a:srgbClr val="000000"/>
                     </a:solidFill>
@@ -15613,7 +15613,7 @@
               </a:ln>
               <a:extLst>
                 <a:ext uri="{91240B29-F687-4f45-9708-019B960494DF}">
-                  <a14:hiddenLine xmlns:a14="http://schemas.microsoft.com/office/drawing/2010/main" xmlns="" w="9525">
+                  <a14:hiddenLine xmlns="" xmlns:a14="http://schemas.microsoft.com/office/drawing/2010/main" w="9525">
                     <a:solidFill>
                       <a:srgbClr val="000000"/>
                     </a:solidFill>
@@ -15647,7 +15647,7 @@
               </a:ln>
               <a:extLst>
                 <a:ext uri="{91240B29-F687-4f45-9708-019B960494DF}">
-                  <a14:hiddenLine xmlns:a14="http://schemas.microsoft.com/office/drawing/2010/main" xmlns="" w="9525">
+                  <a14:hiddenLine xmlns="" xmlns:a14="http://schemas.microsoft.com/office/drawing/2010/main" w="9525">
                     <a:solidFill>
                       <a:srgbClr val="000000"/>
                     </a:solidFill>
@@ -15712,7 +15712,7 @@
               </a:ln>
               <a:extLst>
                 <a:ext uri="{91240B29-F687-4f45-9708-019B960494DF}">
-                  <a14:hiddenLine xmlns:a14="http://schemas.microsoft.com/office/drawing/2010/main" xmlns="" w="9525">
+                  <a14:hiddenLine xmlns="" xmlns:a14="http://schemas.microsoft.com/office/drawing/2010/main" w="9525">
                     <a:solidFill>
                       <a:srgbClr val="000000"/>
                     </a:solidFill>
@@ -15802,7 +15802,7 @@
               </a:ln>
               <a:extLst>
                 <a:ext uri="{91240B29-F687-4f45-9708-019B960494DF}">
-                  <a14:hiddenLine xmlns:a14="http://schemas.microsoft.com/office/drawing/2010/main" xmlns="" w="9525">
+                  <a14:hiddenLine xmlns="" xmlns:a14="http://schemas.microsoft.com/office/drawing/2010/main" w="9525">
                     <a:solidFill>
                       <a:srgbClr val="000000"/>
                     </a:solidFill>
@@ -15864,7 +15864,7 @@
               </a:ln>
               <a:extLst>
                 <a:ext uri="{91240B29-F687-4f45-9708-019B960494DF}">
-                  <a14:hiddenLine xmlns:a14="http://schemas.microsoft.com/office/drawing/2010/main" xmlns="" w="9525">
+                  <a14:hiddenLine xmlns="" xmlns:a14="http://schemas.microsoft.com/office/drawing/2010/main" w="9525">
                     <a:solidFill>
                       <a:srgbClr val="000000"/>
                     </a:solidFill>
@@ -15954,7 +15954,7 @@
               </a:ln>
               <a:extLst>
                 <a:ext uri="{91240B29-F687-4f45-9708-019B960494DF}">
-                  <a14:hiddenLine xmlns:a14="http://schemas.microsoft.com/office/drawing/2010/main" xmlns="" w="9525">
+                  <a14:hiddenLine xmlns="" xmlns:a14="http://schemas.microsoft.com/office/drawing/2010/main" w="9525">
                     <a:solidFill>
                       <a:srgbClr val="000000"/>
                     </a:solidFill>
@@ -16019,7 +16019,7 @@
               </a:ln>
               <a:extLst>
                 <a:ext uri="{91240B29-F687-4f45-9708-019B960494DF}">
-                  <a14:hiddenLine xmlns:a14="http://schemas.microsoft.com/office/drawing/2010/main" xmlns="" w="9525">
+                  <a14:hiddenLine xmlns="" xmlns:a14="http://schemas.microsoft.com/office/drawing/2010/main" w="9525">
                     <a:solidFill>
                       <a:srgbClr val="000000"/>
                     </a:solidFill>
@@ -16081,7 +16081,7 @@
               </a:ln>
               <a:extLst>
                 <a:ext uri="{91240B29-F687-4f45-9708-019B960494DF}">
-                  <a14:hiddenLine xmlns:a14="http://schemas.microsoft.com/office/drawing/2010/main" xmlns="" w="9525">
+                  <a14:hiddenLine xmlns="" xmlns:a14="http://schemas.microsoft.com/office/drawing/2010/main" w="9525">
                     <a:solidFill>
                       <a:srgbClr val="000000"/>
                     </a:solidFill>
@@ -16171,7 +16171,7 @@
               </a:ln>
               <a:extLst>
                 <a:ext uri="{91240B29-F687-4f45-9708-019B960494DF}">
-                  <a14:hiddenLine xmlns:a14="http://schemas.microsoft.com/office/drawing/2010/main" xmlns="" w="9525">
+                  <a14:hiddenLine xmlns="" xmlns:a14="http://schemas.microsoft.com/office/drawing/2010/main" w="9525">
                     <a:solidFill>
                       <a:srgbClr val="000000"/>
                     </a:solidFill>
@@ -16261,7 +16261,7 @@
               </a:ln>
               <a:extLst>
                 <a:ext uri="{91240B29-F687-4f45-9708-019B960494DF}">
-                  <a14:hiddenLine xmlns:a14="http://schemas.microsoft.com/office/drawing/2010/main" xmlns="" w="9525">
+                  <a14:hiddenLine xmlns="" xmlns:a14="http://schemas.microsoft.com/office/drawing/2010/main" w="9525">
                     <a:solidFill>
                       <a:srgbClr val="000000"/>
                     </a:solidFill>
@@ -16326,7 +16326,7 @@
               </a:ln>
               <a:extLst>
                 <a:ext uri="{91240B29-F687-4f45-9708-019B960494DF}">
-                  <a14:hiddenLine xmlns:a14="http://schemas.microsoft.com/office/drawing/2010/main" xmlns="" w="9525">
+                  <a14:hiddenLine xmlns="" xmlns:a14="http://schemas.microsoft.com/office/drawing/2010/main" w="9525">
                     <a:solidFill>
                       <a:srgbClr val="000000"/>
                     </a:solidFill>
@@ -16446,7 +16446,7 @@
               </a:ln>
               <a:extLst>
                 <a:ext uri="{91240B29-F687-4f45-9708-019B960494DF}">
-                  <a14:hiddenLine xmlns:a14="http://schemas.microsoft.com/office/drawing/2010/main" xmlns="" w="9525">
+                  <a14:hiddenLine xmlns="" xmlns:a14="http://schemas.microsoft.com/office/drawing/2010/main" w="9525">
                     <a:solidFill>
                       <a:srgbClr val="000000"/>
                     </a:solidFill>
@@ -16527,7 +16527,7 @@
               </a:ln>
               <a:extLst>
                 <a:ext uri="{91240B29-F687-4f45-9708-019B960494DF}">
-                  <a14:hiddenLine xmlns:a14="http://schemas.microsoft.com/office/drawing/2010/main" xmlns="" w="9525">
+                  <a14:hiddenLine xmlns="" xmlns:a14="http://schemas.microsoft.com/office/drawing/2010/main" w="9525">
                     <a:solidFill>
                       <a:srgbClr val="000000"/>
                     </a:solidFill>
@@ -16642,7 +16642,7 @@
               </a:ln>
               <a:extLst>
                 <a:ext uri="{91240B29-F687-4f45-9708-019B960494DF}">
-                  <a14:hiddenLine xmlns:a14="http://schemas.microsoft.com/office/drawing/2010/main" xmlns="" w="9525">
+                  <a14:hiddenLine xmlns="" xmlns:a14="http://schemas.microsoft.com/office/drawing/2010/main" w="9525">
                     <a:solidFill>
                       <a:srgbClr val="000000"/>
                     </a:solidFill>
@@ -16732,7 +16732,7 @@
               </a:ln>
               <a:extLst>
                 <a:ext uri="{91240B29-F687-4f45-9708-019B960494DF}">
-                  <a14:hiddenLine xmlns:a14="http://schemas.microsoft.com/office/drawing/2010/main" xmlns="" w="9525">
+                  <a14:hiddenLine xmlns="" xmlns:a14="http://schemas.microsoft.com/office/drawing/2010/main" w="9525">
                     <a:solidFill>
                       <a:srgbClr val="000000"/>
                     </a:solidFill>
@@ -16797,7 +16797,7 @@
               </a:ln>
               <a:extLst>
                 <a:ext uri="{91240B29-F687-4f45-9708-019B960494DF}">
-                  <a14:hiddenLine xmlns:a14="http://schemas.microsoft.com/office/drawing/2010/main" xmlns="" w="9525">
+                  <a14:hiddenLine xmlns="" xmlns:a14="http://schemas.microsoft.com/office/drawing/2010/main" w="9525">
                     <a:solidFill>
                       <a:srgbClr val="000000"/>
                     </a:solidFill>
@@ -16887,7 +16887,7 @@
               </a:ln>
               <a:extLst>
                 <a:ext uri="{91240B29-F687-4f45-9708-019B960494DF}">
-                  <a14:hiddenLine xmlns:a14="http://schemas.microsoft.com/office/drawing/2010/main" xmlns="" w="9525">
+                  <a14:hiddenLine xmlns="" xmlns:a14="http://schemas.microsoft.com/office/drawing/2010/main" w="9525">
                     <a:solidFill>
                       <a:srgbClr val="000000"/>
                     </a:solidFill>
@@ -16955,7 +16955,7 @@
               </a:ln>
               <a:extLst>
                 <a:ext uri="{91240B29-F687-4f45-9708-019B960494DF}">
-                  <a14:hiddenLine xmlns:a14="http://schemas.microsoft.com/office/drawing/2010/main" xmlns="" w="9525">
+                  <a14:hiddenLine xmlns="" xmlns:a14="http://schemas.microsoft.com/office/drawing/2010/main" w="9525">
                     <a:solidFill>
                       <a:srgbClr val="000000"/>
                     </a:solidFill>
@@ -17045,7 +17045,7 @@
               </a:ln>
               <a:extLst>
                 <a:ext uri="{91240B29-F687-4f45-9708-019B960494DF}">
-                  <a14:hiddenLine xmlns:a14="http://schemas.microsoft.com/office/drawing/2010/main" xmlns="" w="9525">
+                  <a14:hiddenLine xmlns="" xmlns:a14="http://schemas.microsoft.com/office/drawing/2010/main" w="9525">
                     <a:solidFill>
                       <a:srgbClr val="000000"/>
                     </a:solidFill>
@@ -17113,7 +17113,7 @@
               </a:ln>
               <a:extLst>
                 <a:ext uri="{91240B29-F687-4f45-9708-019B960494DF}">
-                  <a14:hiddenLine xmlns:a14="http://schemas.microsoft.com/office/drawing/2010/main" xmlns="" w="9525">
+                  <a14:hiddenLine xmlns="" xmlns:a14="http://schemas.microsoft.com/office/drawing/2010/main" w="9525">
                     <a:solidFill>
                       <a:srgbClr val="000000"/>
                     </a:solidFill>
@@ -17203,7 +17203,7 @@
               </a:ln>
               <a:extLst>
                 <a:ext uri="{91240B29-F687-4f45-9708-019B960494DF}">
-                  <a14:hiddenLine xmlns:a14="http://schemas.microsoft.com/office/drawing/2010/main" xmlns="" w="9525">
+                  <a14:hiddenLine xmlns="" xmlns:a14="http://schemas.microsoft.com/office/drawing/2010/main" w="9525">
                     <a:solidFill>
                       <a:srgbClr val="000000"/>
                     </a:solidFill>
@@ -17237,7 +17237,7 @@
               </a:ln>
               <a:extLst>
                 <a:ext uri="{91240B29-F687-4f45-9708-019B960494DF}">
-                  <a14:hiddenLine xmlns:a14="http://schemas.microsoft.com/office/drawing/2010/main" xmlns="" w="9525">
+                  <a14:hiddenLine xmlns="" xmlns:a14="http://schemas.microsoft.com/office/drawing/2010/main" w="9525">
                     <a:solidFill>
                       <a:srgbClr val="000000"/>
                     </a:solidFill>
@@ -20531,7 +20531,7 @@
         <p:spPr>
           <a:xfrm>
             <a:off x="1143499" y="1488613"/>
-            <a:ext cx="8596668" cy="3880773"/>
+            <a:ext cx="8596668" cy="5206337"/>
           </a:xfrm>
         </p:spPr>
         <p:txBody>
@@ -20550,10 +20550,43 @@
               <a:rPr lang="en-US"/>
               <a:t>Programming Assignment</a:t>
             </a:r>
-            <a:endParaRPr lang="en-US" dirty="0"/>
+          </a:p>
+          <a:p>
+            <a:endParaRPr lang="en-US"/>
+          </a:p>
+          <a:p>
+            <a:r>
+              <a:rPr lang="en-US"/>
+              <a:t>The next lecture would be dedicated to prepping for the midterm</a:t>
+            </a:r>
           </a:p>
           <a:p>
             <a:pPr lvl="1"/>
+            <a:r>
+              <a:rPr lang="en-US"/>
+              <a:t>Basically just go over some example problems and answer questions as needed</a:t>
+            </a:r>
+          </a:p>
+          <a:p>
+            <a:pPr lvl="1"/>
+            <a:r>
+              <a:rPr lang="en-US"/>
+              <a:t>Since this is a YouTube series and not a “real” classroom, I’ll just post the example problems with solutions in the lecture_6 folder on Github</a:t>
+            </a:r>
+          </a:p>
+          <a:p>
+            <a:pPr lvl="1"/>
+            <a:r>
+              <a:rPr lang="en-US"/>
+              <a:t>The midterm will be a single problem in the lecture_7 folder on Github</a:t>
+            </a:r>
+          </a:p>
+          <a:p>
+            <a:pPr lvl="2"/>
+            <a:r>
+              <a:rPr lang="en-US"/>
+              <a:t>To make it more realistic to a classroom, try to complete it in one, 75 minute sitting</a:t>
+            </a:r>
             <a:endParaRPr lang="en-US" dirty="0"/>
           </a:p>
           <a:p>

--- a/lecture_5/Lecture_5.pptx
+++ b/lecture_5/Lecture_5.pptx
@@ -5210,7 +5210,7 @@
           <a:p>
             <a:fld id="{870534A9-6018-2047-913D-1953A2F6D512}" type="datetimeFigureOut">
               <a:rPr lang="en-US" smtClean="0"/>
-              <a:t>12/27/2021</a:t>
+              <a:t>12/28/2021</a:t>
             </a:fld>
             <a:endParaRPr lang="en-US"/>
           </a:p>
@@ -9759,7 +9759,7 @@
           <a:p>
             <a:fld id="{B3A65DBF-A9F0-C148-993C-2303F706A4CD}" type="datetimeFigureOut">
               <a:rPr lang="en-US" smtClean="0"/>
-              <a:t>12/27/2021</a:t>
+              <a:t>12/28/2021</a:t>
             </a:fld>
             <a:endParaRPr lang="en-US"/>
           </a:p>
@@ -10026,7 +10026,7 @@
           <a:p>
             <a:fld id="{B3A65DBF-A9F0-C148-993C-2303F706A4CD}" type="datetimeFigureOut">
               <a:rPr lang="en-US" smtClean="0"/>
-              <a:t>12/27/2021</a:t>
+              <a:t>12/28/2021</a:t>
             </a:fld>
             <a:endParaRPr lang="en-US"/>
           </a:p>
@@ -10222,7 +10222,7 @@
           <a:p>
             <a:fld id="{B3A65DBF-A9F0-C148-993C-2303F706A4CD}" type="datetimeFigureOut">
               <a:rPr lang="en-US" smtClean="0"/>
-              <a:t>12/27/2021</a:t>
+              <a:t>12/28/2021</a:t>
             </a:fld>
             <a:endParaRPr lang="en-US"/>
           </a:p>
@@ -10485,7 +10485,7 @@
           <a:p>
             <a:fld id="{B3A65DBF-A9F0-C148-993C-2303F706A4CD}" type="datetimeFigureOut">
               <a:rPr lang="en-US" smtClean="0"/>
-              <a:t>12/27/2021</a:t>
+              <a:t>12/28/2021</a:t>
             </a:fld>
             <a:endParaRPr lang="en-US"/>
           </a:p>
@@ -10919,7 +10919,7 @@
           <a:p>
             <a:fld id="{B3A65DBF-A9F0-C148-993C-2303F706A4CD}" type="datetimeFigureOut">
               <a:rPr lang="en-US" smtClean="0"/>
-              <a:t>12/27/2021</a:t>
+              <a:t>12/28/2021</a:t>
             </a:fld>
             <a:endParaRPr lang="en-US"/>
           </a:p>
@@ -11465,7 +11465,7 @@
           <a:p>
             <a:fld id="{B3A65DBF-A9F0-C148-993C-2303F706A4CD}" type="datetimeFigureOut">
               <a:rPr lang="en-US" smtClean="0"/>
-              <a:t>12/27/2021</a:t>
+              <a:t>12/28/2021</a:t>
             </a:fld>
             <a:endParaRPr lang="en-US"/>
           </a:p>
@@ -12185,7 +12185,7 @@
           <a:p>
             <a:fld id="{B3A65DBF-A9F0-C148-993C-2303F706A4CD}" type="datetimeFigureOut">
               <a:rPr lang="en-US" smtClean="0"/>
-              <a:t>12/27/2021</a:t>
+              <a:t>12/28/2021</a:t>
             </a:fld>
             <a:endParaRPr lang="en-US"/>
           </a:p>
@@ -12355,7 +12355,7 @@
           <a:p>
             <a:fld id="{B3A65DBF-A9F0-C148-993C-2303F706A4CD}" type="datetimeFigureOut">
               <a:rPr lang="en-US" smtClean="0"/>
-              <a:t>12/27/2021</a:t>
+              <a:t>12/28/2021</a:t>
             </a:fld>
             <a:endParaRPr lang="en-US"/>
           </a:p>
@@ -12535,7 +12535,7 @@
           <a:p>
             <a:fld id="{B3A65DBF-A9F0-C148-993C-2303F706A4CD}" type="datetimeFigureOut">
               <a:rPr lang="en-US" smtClean="0"/>
-              <a:t>12/27/2021</a:t>
+              <a:t>12/28/2021</a:t>
             </a:fld>
             <a:endParaRPr lang="en-US"/>
           </a:p>
@@ -12705,7 +12705,7 @@
           <a:p>
             <a:fld id="{B3A65DBF-A9F0-C148-993C-2303F706A4CD}" type="datetimeFigureOut">
               <a:rPr lang="en-US" smtClean="0"/>
-              <a:t>12/27/2021</a:t>
+              <a:t>12/28/2021</a:t>
             </a:fld>
             <a:endParaRPr lang="en-US"/>
           </a:p>
@@ -12955,7 +12955,7 @@
           <a:p>
             <a:fld id="{B3A65DBF-A9F0-C148-993C-2303F706A4CD}" type="datetimeFigureOut">
               <a:rPr lang="en-US" smtClean="0"/>
-              <a:t>12/27/2021</a:t>
+              <a:t>12/28/2021</a:t>
             </a:fld>
             <a:endParaRPr lang="en-US"/>
           </a:p>
@@ -13187,7 +13187,7 @@
           <a:p>
             <a:fld id="{B3A65DBF-A9F0-C148-993C-2303F706A4CD}" type="datetimeFigureOut">
               <a:rPr lang="en-US" smtClean="0"/>
-              <a:t>12/27/2021</a:t>
+              <a:t>12/28/2021</a:t>
             </a:fld>
             <a:endParaRPr lang="en-US"/>
           </a:p>
@@ -13568,7 +13568,7 @@
           <a:p>
             <a:fld id="{B3A65DBF-A9F0-C148-993C-2303F706A4CD}" type="datetimeFigureOut">
               <a:rPr lang="en-US" smtClean="0"/>
-              <a:t>12/27/2021</a:t>
+              <a:t>12/28/2021</a:t>
             </a:fld>
             <a:endParaRPr lang="en-US"/>
           </a:p>
@@ -13686,7 +13686,7 @@
           <a:p>
             <a:fld id="{B3A65DBF-A9F0-C148-993C-2303F706A4CD}" type="datetimeFigureOut">
               <a:rPr lang="en-US" smtClean="0"/>
-              <a:t>12/27/2021</a:t>
+              <a:t>12/28/2021</a:t>
             </a:fld>
             <a:endParaRPr lang="en-US"/>
           </a:p>
@@ -13781,7 +13781,7 @@
           <a:p>
             <a:fld id="{B3A65DBF-A9F0-C148-993C-2303F706A4CD}" type="datetimeFigureOut">
               <a:rPr lang="en-US" smtClean="0"/>
-              <a:t>12/27/2021</a:t>
+              <a:t>12/28/2021</a:t>
             </a:fld>
             <a:endParaRPr lang="en-US"/>
           </a:p>
@@ -14030,7 +14030,7 @@
           <a:p>
             <a:fld id="{B3A65DBF-A9F0-C148-993C-2303F706A4CD}" type="datetimeFigureOut">
               <a:rPr lang="en-US" smtClean="0"/>
-              <a:t>12/27/2021</a:t>
+              <a:t>12/28/2021</a:t>
             </a:fld>
             <a:endParaRPr lang="en-US"/>
           </a:p>
@@ -14310,7 +14310,7 @@
           <a:p>
             <a:fld id="{B3A65DBF-A9F0-C148-993C-2303F706A4CD}" type="datetimeFigureOut">
               <a:rPr lang="en-US" smtClean="0"/>
-              <a:t>12/27/2021</a:t>
+              <a:t>12/28/2021</a:t>
             </a:fld>
             <a:endParaRPr lang="en-US"/>
           </a:p>
@@ -17377,7 +17377,7 @@
           <a:p>
             <a:fld id="{B3A65DBF-A9F0-C148-993C-2303F706A4CD}" type="datetimeFigureOut">
               <a:rPr lang="en-US" smtClean="0"/>
-              <a:t>12/27/2021</a:t>
+              <a:t>12/28/2021</a:t>
             </a:fld>
             <a:endParaRPr lang="en-US"/>
           </a:p>
@@ -18812,15 +18812,7 @@
             <a:pPr lvl="1"/>
             <a:r>
               <a:rPr lang="en-US"/>
-              <a:t>* </a:t>
-            </a:r>
-            <a:r>
-              <a:rPr lang="en-US" err="1"/>
-              <a:t>args</a:t>
-            </a:r>
-            <a:r>
-              <a:rPr lang="en-US"/>
-              <a:t>– used when unknown number of arguments passed</a:t>
+              <a:t>*args– used when unknown number of arguments passed</a:t>
             </a:r>
           </a:p>
           <a:p>
@@ -20541,18 +20533,16 @@
           <a:lstStyle/>
           <a:p>
             <a:r>
-              <a:rPr lang="en-US" dirty="0"/>
-              <a:t>Read chapter 6</a:t>
-            </a:r>
+              <a:rPr lang="en-US"/>
+              <a:t>Read chapters 6 &amp; 7 (8 &amp; 9 optional)</a:t>
+            </a:r>
+            <a:endParaRPr lang="en-US" dirty="0"/>
           </a:p>
           <a:p>
             <a:r>
               <a:rPr lang="en-US"/>
               <a:t>Programming Assignment</a:t>
             </a:r>
-          </a:p>
-          <a:p>
-            <a:endParaRPr lang="en-US"/>
           </a:p>
           <a:p>
             <a:r>
@@ -20784,7 +20774,7 @@
         </p:nvSpPr>
         <p:spPr>
           <a:xfrm>
-            <a:off x="2046997" y="2381389"/>
+            <a:off x="2024137" y="2467192"/>
             <a:ext cx="7266877" cy="337126"/>
           </a:xfrm>
           <a:prstGeom prst="rect">
@@ -20830,7 +20820,7 @@
         </p:nvSpPr>
         <p:spPr>
           <a:xfrm>
-            <a:off x="1920249" y="3284023"/>
+            <a:off x="1943109" y="3325644"/>
             <a:ext cx="7266877" cy="337126"/>
           </a:xfrm>
           <a:prstGeom prst="rect">
@@ -21033,7 +21023,7 @@
         </p:nvSpPr>
         <p:spPr>
           <a:xfrm>
-            <a:off x="2345428" y="4427722"/>
+            <a:off x="2330188" y="4495292"/>
             <a:ext cx="5965901" cy="734122"/>
           </a:xfrm>
           <a:prstGeom prst="rect">
